--- a/courseware/202612_DSA_W15_Hash_KMP_InvertedIndex_RAG.pptx
+++ b/courseware/202612_DSA_W15_Hash_KMP_InvertedIndex_RAG.pptx
@@ -7479,7 +7479,7 @@
                 <a:latin typeface="Segoe UI"/>
                 <a:ea typeface="微软雅黑"/>
               </a:rPr>
-              <a:t>OJ 01961 Period、OJ 02406 Power Strings 都是这个模板</a:t>
+              <a:t>OJ 01961 前缀中的周期、OJ 02406 字符串乘方 都是这个模板</a:t>
             </a:r>
           </a:p>
         </p:txBody>
@@ -17545,7 +17545,7 @@
                           <a:latin typeface="Segoe UI"/>
                           <a:ea typeface="微软雅黑"/>
                         </a:rPr>
-                        <a:t>Power Strings</a:t>
+                        <a:t>字符串乘方</a:t>
                       </a:r>
                     </a:p>
                   </a:txBody>
